--- a/docs/gallery/demo-deck.pptx
+++ b/docs/gallery/demo-deck.pptx
@@ -6376,7 +6376,7 @@
                 </a:solidFill>
                 <a:latin typeface="Helvetica Neue"/>
               </a:rPr>
-              <a:t>•  feasibility: red verdict on d1329c271b9c4ec0a7033715c8b4111c: verdict red, effort L - A rider-voted pickup map fights the optimizer head-on; every vote becomes a c</a:t>
+              <a:t>•  feasibility: red verdict on b618fc2dcd454bd0933a6c004f44fcfa: verdict red, effort L - A rider-voted pickup map fights the optimizer head-on; every vote becomes a c</a:t>
             </a:r>
           </a:p>
         </p:txBody>

--- a/docs/gallery/demo-deck.pptx
+++ b/docs/gallery/demo-deck.pptx
@@ -15,6 +15,7 @@
     <p:sldId id="263" r:id="rId14"/>
     <p:sldId id="264" r:id="rId15"/>
     <p:sldId id="265" r:id="rId16"/>
+    <p:sldId id="266" r:id="rId17"/>
   </p:sldIdLst>
   <p:sldSz cx="12191695" cy="6858000" type="screen4x3"/>
   <p:notesSz cx="6858000" cy="9144000"/>
@@ -3251,7 +3252,7 @@
                 </a:solidFill>
                 <a:latin typeface="Helvetica Neue"/>
               </a:rPr>
-              <a:t>Session 'gallery' · 20 evidence items · 9 options · register 4/2/4 (supported/contradicted/untested) · ~$0.00</a:t>
+              <a:t>Session 'gallery' · 28 evidence items · 9 options · register 4/2/4 (supported/contradicted/untested) · ~$10.23</a:t>
             </a:r>
           </a:p>
         </p:txBody>
@@ -3347,7 +3348,7 @@
                 </a:solidFill>
                 <a:latin typeface="Helvetica Neue"/>
               </a:rPr>
-              <a:t>APPENDIX</a:t>
+              <a:t>ACTION ORIENTED</a:t>
             </a:r>
           </a:p>
         </p:txBody>
@@ -3386,7 +3387,7 @@
                 </a:solidFill>
                 <a:latin typeface="Helvetica Neue"/>
               </a:rPr>
-              <a:t>Specifications handed off + the paper trail</a:t>
+              <a:t>What to do next, in order</a:t>
             </a:r>
           </a:p>
         </p:txBody>
@@ -3426,6 +3427,351 @@
                 <a:latin typeface="Helvetica Neue"/>
               </a:rPr>
               <a:t>Bokken · session gallery — generated from the Journal, no manual edits        09</a:t>
+            </a:r>
+          </a:p>
+        </p:txBody>
+      </p:sp>
+      <p:graphicFrame>
+        <p:nvGraphicFramePr>
+          <p:cNvPr id="5" name="Table 4"/>
+          <p:cNvGraphicFramePr>
+            <a:graphicFrameLocks noGrp="1"/>
+          </p:cNvGraphicFramePr>
+          <p:nvPr/>
+        </p:nvGraphicFramePr>
+        <p:xfrm>
+          <a:off x="548640" y="1463040"/>
+          <a:ext cx="11091672" cy="2487168"/>
+        </p:xfrm>
+        <a:graphic>
+          <a:graphicData uri="http://schemas.openxmlformats.org/drawingml/2006/table">
+            <a:tbl>
+              <a:tblPr firstRow="1" bandRow="1">
+                <a:tableStyleId>{5C22544A-7EE6-4342-B048-85BDC9FD1C3A}</a:tableStyleId>
+              </a:tblPr>
+              <a:tblGrid>
+                <a:gridCol w="548640"/>
+                <a:gridCol w="10543032"/>
+              </a:tblGrid>
+              <a:tr h="621792">
+                <a:tc>
+                  <a:txBody>
+                    <a:bodyPr wrap="square"/>
+                    <a:lstStyle/>
+                    <a:p>
+                      <a:r>
+                        <a:rPr sz="1000" b="1">
+                          <a:solidFill>
+                            <a:srgbClr val="FFFFFF"/>
+                          </a:solidFill>
+                          <a:latin typeface="Helvetica Neue"/>
+                        </a:rPr>
+                        <a:t>#</a:t>
+                      </a:r>
+                    </a:p>
+                  </a:txBody>
+                  <a:tcPr marL="54864" marR="54864" marT="18288" marB="18288" anchor="ctr">
+                    <a:solidFill>
+                      <a:srgbClr val="1F2430"/>
+                    </a:solidFill>
+                  </a:tcPr>
+                </a:tc>
+                <a:tc>
+                  <a:txBody>
+                    <a:bodyPr wrap="square"/>
+                    <a:lstStyle/>
+                    <a:p>
+                      <a:r>
+                        <a:rPr sz="1000" b="1">
+                          <a:solidFill>
+                            <a:srgbClr val="FFFFFF"/>
+                          </a:solidFill>
+                          <a:latin typeface="Helvetica Neue"/>
+                        </a:rPr>
+                        <a:t>Action</a:t>
+                      </a:r>
+                    </a:p>
+                  </a:txBody>
+                  <a:tcPr marL="54864" marR="54864" marT="18288" marB="18288" anchor="ctr">
+                    <a:solidFill>
+                      <a:srgbClr val="1F2430"/>
+                    </a:solidFill>
+                  </a:tcPr>
+                </a:tc>
+              </a:tr>
+              <a:tr h="621792">
+                <a:tc>
+                  <a:txBody>
+                    <a:bodyPr wrap="square"/>
+                    <a:lstStyle/>
+                    <a:p>
+                      <a:r>
+                        <a:rPr sz="950" b="0">
+                          <a:solidFill>
+                            <a:srgbClr val="1F2430"/>
+                          </a:solidFill>
+                          <a:latin typeface="Helvetica Neue"/>
+                        </a:rPr>
+                        <a:t>1</a:t>
+                      </a:r>
+                    </a:p>
+                  </a:txBody>
+                  <a:tcPr marL="54864" marR="54864" marT="18288" marB="18288" anchor="ctr">
+                    <a:solidFill>
+                      <a:srgbClr val="FAF7F2"/>
+                    </a:solidFill>
+                  </a:tcPr>
+                </a:tc>
+                <a:tc>
+                  <a:txBody>
+                    <a:bodyPr wrap="square"/>
+                    <a:lstStyle/>
+                    <a:p>
+                      <a:r>
+                        <a:rPr sz="950" b="0">
+                          <a:solidFill>
+                            <a:srgbClr val="1F2430"/>
+                          </a:solidFill>
+                          <a:latin typeface="Helvetica Neue"/>
+                        </a:rPr>
+                        <a:t>Fix (Indicador de puntualidad de ayer): The card shows a green 'Ventana cumplida' tick directly above a notice that the arrival alert went out 9 minutes after the pr</a:t>
+                      </a:r>
+                    </a:p>
+                  </a:txBody>
+                  <a:tcPr marL="54864" marR="54864" marT="18288" marB="18288" anchor="ctr">
+                    <a:solidFill>
+                      <a:srgbClr val="FAF7F2"/>
+                    </a:solidFill>
+                  </a:tcPr>
+                </a:tc>
+              </a:tr>
+              <a:tr h="621792">
+                <a:tc>
+                  <a:txBody>
+                    <a:bodyPr wrap="square"/>
+                    <a:lstStyle/>
+                    <a:p>
+                      <a:r>
+                        <a:rPr sz="950" b="0">
+                          <a:solidFill>
+                            <a:srgbClr val="1F2430"/>
+                          </a:solidFill>
+                          <a:latin typeface="Helvetica Neue"/>
+                        </a:rPr>
+                        <a:t>2</a:t>
+                      </a:r>
+                    </a:p>
+                  </a:txBody>
+                  <a:tcPr marL="54864" marR="54864" marT="18288" marB="18288" anchor="ctr">
+                    <a:solidFill>
+                      <a:srgbClr val="F1ECE2"/>
+                    </a:solidFill>
+                  </a:tcPr>
+                </a:tc>
+                <a:tc>
+                  <a:txBody>
+                    <a:bodyPr wrap="square"/>
+                    <a:lstStyle/>
+                    <a:p>
+                      <a:r>
+                        <a:rPr sz="950" b="0">
+                          <a:solidFill>
+                            <a:srgbClr val="1F2430"/>
+                          </a:solidFill>
+                          <a:latin typeface="Helvetica Neue"/>
+                        </a:rPr>
+                        <a:t>Address the test contradiction: A test result contradicts earlier work: the 'honesty reduces churn' assumption is contradicted by the same evidence that supports dem</a:t>
+                      </a:r>
+                    </a:p>
+                  </a:txBody>
+                  <a:tcPr marL="54864" marR="54864" marT="18288" marB="18288" anchor="ctr">
+                    <a:solidFill>
+                      <a:srgbClr val="F1ECE2"/>
+                    </a:solidFill>
+                  </a:tcPr>
+                </a:tc>
+              </a:tr>
+              <a:tr h="621792">
+                <a:tc>
+                  <a:txBody>
+                    <a:bodyPr wrap="square"/>
+                    <a:lstStyle/>
+                    <a:p>
+                      <a:r>
+                        <a:rPr sz="950" b="0">
+                          <a:solidFill>
+                            <a:srgbClr val="1F2430"/>
+                          </a:solidFill>
+                          <a:latin typeface="Helvetica Neue"/>
+                        </a:rPr>
+                        <a:t>3</a:t>
+                      </a:r>
+                    </a:p>
+                  </a:txBody>
+                  <a:tcPr marL="54864" marR="54864" marT="18288" marB="18288" anchor="ctr">
+                    <a:solidFill>
+                      <a:srgbClr val="FAF7F2"/>
+                    </a:solidFill>
+                  </a:tcPr>
+                </a:tc>
+                <a:tc>
+                  <a:txBody>
+                    <a:bodyPr wrap="square"/>
+                    <a:lstStyle/>
+                    <a:p>
+                      <a:r>
+                        <a:rPr sz="950" b="0">
+                          <a:solidFill>
+                            <a:srgbClr val="1F2430"/>
+                          </a:solidFill>
+                          <a:latin typeface="Helvetica Neue"/>
+                        </a:rPr>
+                        <a:t>Recommendation is 'iterate': validate the supported assumptions with real users before building.</a:t>
+                      </a:r>
+                    </a:p>
+                  </a:txBody>
+                  <a:tcPr marL="54864" marR="54864" marT="18288" marB="18288" anchor="ctr">
+                    <a:solidFill>
+                      <a:srgbClr val="FAF7F2"/>
+                    </a:solidFill>
+                  </a:tcPr>
+                </a:tc>
+              </a:tr>
+            </a:tbl>
+          </a:graphicData>
+        </a:graphic>
+      </p:graphicFrame>
+    </p:spTree>
+  </p:cSld>
+  <p:clrMapOvr>
+    <a:masterClrMapping/>
+  </p:clrMapOvr>
+</p:sld>
+</file>
+
+<file path=ppt/slides/slide11.xml><?xml version="1.0" encoding="utf-8"?>
+<p:sld xmlns:a="http://schemas.openxmlformats.org/drawingml/2006/main" xmlns:p="http://schemas.openxmlformats.org/presentationml/2006/main" xmlns:r="http://schemas.openxmlformats.org/officeDocument/2006/relationships">
+  <p:cSld>
+    <p:spTree>
+      <p:nvGrpSpPr>
+        <p:cNvPr id="1" name=""/>
+        <p:cNvGrpSpPr/>
+        <p:nvPr/>
+      </p:nvGrpSpPr>
+      <p:grpSpPr/>
+      <p:sp>
+        <p:nvSpPr>
+          <p:cNvPr id="2" name="TextBox 1"/>
+          <p:cNvSpPr txBox="1"/>
+          <p:nvPr/>
+        </p:nvSpPr>
+        <p:spPr>
+          <a:xfrm>
+            <a:off x="548640" y="365760"/>
+            <a:ext cx="11091672" cy="274320"/>
+          </a:xfrm>
+          <a:prstGeom prst="rect">
+            <a:avLst/>
+          </a:prstGeom>
+          <a:noFill/>
+        </p:spPr>
+        <p:txBody>
+          <a:bodyPr wrap="square">
+            <a:spAutoFit/>
+          </a:bodyPr>
+          <a:lstStyle/>
+          <a:p>
+            <a:pPr algn="l">
+              <a:spcBef>
+                <a:spcPts val="0"/>
+              </a:spcBef>
+            </a:pPr>
+            <a:r>
+              <a:rPr sz="1100" b="1">
+                <a:solidFill>
+                  <a:srgbClr val="C73E3A"/>
+                </a:solidFill>
+                <a:latin typeface="Helvetica Neue"/>
+              </a:rPr>
+              <a:t>APPENDIX</a:t>
+            </a:r>
+          </a:p>
+        </p:txBody>
+      </p:sp>
+      <p:sp>
+        <p:nvSpPr>
+          <p:cNvPr id="3" name="TextBox 2"/>
+          <p:cNvSpPr txBox="1"/>
+          <p:nvPr/>
+        </p:nvSpPr>
+        <p:spPr>
+          <a:xfrm>
+            <a:off x="548640" y="658368"/>
+            <a:ext cx="11091672" cy="640080"/>
+          </a:xfrm>
+          <a:prstGeom prst="rect">
+            <a:avLst/>
+          </a:prstGeom>
+          <a:noFill/>
+        </p:spPr>
+        <p:txBody>
+          <a:bodyPr wrap="square">
+            <a:spAutoFit/>
+          </a:bodyPr>
+          <a:lstStyle/>
+          <a:p>
+            <a:pPr algn="l">
+              <a:spcBef>
+                <a:spcPts val="0"/>
+              </a:spcBef>
+            </a:pPr>
+            <a:r>
+              <a:rPr sz="2500" b="1">
+                <a:solidFill>
+                  <a:srgbClr val="1F2430"/>
+                </a:solidFill>
+                <a:latin typeface="Helvetica Neue"/>
+              </a:rPr>
+              <a:t>Specifications handed off + the paper trail</a:t>
+            </a:r>
+          </a:p>
+        </p:txBody>
+      </p:sp>
+      <p:sp>
+        <p:nvSpPr>
+          <p:cNvPr id="4" name="TextBox 3"/>
+          <p:cNvSpPr txBox="1"/>
+          <p:nvPr/>
+        </p:nvSpPr>
+        <p:spPr>
+          <a:xfrm>
+            <a:off x="548640" y="6473952"/>
+            <a:ext cx="11091672" cy="274320"/>
+          </a:xfrm>
+          <a:prstGeom prst="rect">
+            <a:avLst/>
+          </a:prstGeom>
+          <a:noFill/>
+        </p:spPr>
+        <p:txBody>
+          <a:bodyPr wrap="square">
+            <a:spAutoFit/>
+          </a:bodyPr>
+          <a:lstStyle/>
+          <a:p>
+            <a:pPr algn="l">
+              <a:spcBef>
+                <a:spcPts val="0"/>
+              </a:spcBef>
+            </a:pPr>
+            <a:r>
+              <a:rPr sz="800" b="0">
+                <a:solidFill>
+                  <a:srgbClr val="6B7280"/>
+                </a:solidFill>
+                <a:latin typeface="Helvetica Neue"/>
+              </a:rPr>
+              <a:t>Bokken · session gallery — generated from the Journal, no manual edits        10</a:t>
             </a:r>
           </a:p>
         </p:txBody>
@@ -3710,7 +4056,7 @@
         </p:nvGraphicFramePr>
         <p:xfrm>
           <a:off x="548640" y="1463040"/>
-          <a:ext cx="11091672" cy="3401568"/>
+          <a:ext cx="11091672" cy="3968496"/>
         </p:xfrm>
         <a:graphic>
           <a:graphicData uri="http://schemas.openxmlformats.org/drawingml/2006/table">
@@ -4008,7 +4354,7 @@
                           </a:solidFill>
                           <a:latin typeface="Helvetica Neue"/>
                         </a:rPr>
-                        <a:t>Register</a:t>
+                        <a:t>Product tested</a:t>
                       </a:r>
                     </a:p>
                   </a:txBody>
@@ -4030,7 +4376,7 @@
                           </a:solidFill>
                           <a:latin typeface="Helvetica Neue"/>
                         </a:rPr>
-                        <a:t>4 supported · 2 contradicted · 4 untested</a:t>
+                        <a:t>4 features exercised, 1 broken</a:t>
                       </a:r>
                     </a:p>
                   </a:txBody>
@@ -4052,7 +4398,7 @@
                           </a:solidFill>
                           <a:latin typeface="Helvetica Neue"/>
                         </a:rPr>
-                        <a:t>verdict: iterate</a:t>
+                        <a:t>fix list in Next Actions</a:t>
                       </a:r>
                     </a:p>
                   </a:txBody>
@@ -4076,13 +4422,81 @@
                           </a:solidFill>
                           <a:latin typeface="Helvetica Neue"/>
                         </a:rPr>
+                        <a:t>Register</a:t>
+                      </a:r>
+                    </a:p>
+                  </a:txBody>
+                  <a:tcPr marL="54864" marR="54864" marT="18288" marB="18288" anchor="ctr">
+                    <a:solidFill>
+                      <a:srgbClr val="FAF7F2"/>
+                    </a:solidFill>
+                  </a:tcPr>
+                </a:tc>
+                <a:tc>
+                  <a:txBody>
+                    <a:bodyPr wrap="square"/>
+                    <a:lstStyle/>
+                    <a:p>
+                      <a:r>
+                        <a:rPr sz="950" b="0">
+                          <a:solidFill>
+                            <a:srgbClr val="1F2430"/>
+                          </a:solidFill>
+                          <a:latin typeface="Helvetica Neue"/>
+                        </a:rPr>
+                        <a:t>4 supported · 2 contradicted · 4 untested</a:t>
+                      </a:r>
+                    </a:p>
+                  </a:txBody>
+                  <a:tcPr marL="54864" marR="54864" marT="18288" marB="18288" anchor="ctr">
+                    <a:solidFill>
+                      <a:srgbClr val="FAF7F2"/>
+                    </a:solidFill>
+                  </a:tcPr>
+                </a:tc>
+                <a:tc>
+                  <a:txBody>
+                    <a:bodyPr wrap="square"/>
+                    <a:lstStyle/>
+                    <a:p>
+                      <a:r>
+                        <a:rPr sz="950" b="0">
+                          <a:solidFill>
+                            <a:srgbClr val="1F2430"/>
+                          </a:solidFill>
+                          <a:latin typeface="Helvetica Neue"/>
+                        </a:rPr>
+                        <a:t>verdict: iterate</a:t>
+                      </a:r>
+                    </a:p>
+                  </a:txBody>
+                  <a:tcPr marL="54864" marR="54864" marT="18288" marB="18288" anchor="ctr">
+                    <a:solidFill>
+                      <a:srgbClr val="FAF7F2"/>
+                    </a:solidFill>
+                  </a:tcPr>
+                </a:tc>
+              </a:tr>
+              <a:tr h="566928">
+                <a:tc>
+                  <a:txBody>
+                    <a:bodyPr wrap="square"/>
+                    <a:lstStyle/>
+                    <a:p>
+                      <a:r>
+                        <a:rPr sz="950" b="0">
+                          <a:solidFill>
+                            <a:srgbClr val="1F2430"/>
+                          </a:solidFill>
+                          <a:latin typeface="Helvetica Neue"/>
+                        </a:rPr>
                         <a:t>Cost</a:t>
                       </a:r>
                     </a:p>
                   </a:txBody>
                   <a:tcPr marL="54864" marR="54864" marT="18288" marB="18288" anchor="ctr">
                     <a:solidFill>
-                      <a:srgbClr val="FAF7F2"/>
+                      <a:srgbClr val="F1ECE2"/>
                     </a:solidFill>
                   </a:tcPr>
                 </a:tc>
@@ -4098,13 +4512,13 @@
                           </a:solidFill>
                           <a:latin typeface="Helvetica Neue"/>
                         </a:rPr>
-                        <a:t>$0.00 · 47 model calls</a:t>
-                      </a:r>
-                    </a:p>
-                  </a:txBody>
-                  <a:tcPr marL="54864" marR="54864" marT="18288" marB="18288" anchor="ctr">
-                    <a:solidFill>
-                      <a:srgbClr val="FAF7F2"/>
+                        <a:t>$10.23 · 62 model calls</a:t>
+                      </a:r>
+                    </a:p>
+                  </a:txBody>
+                  <a:tcPr marL="54864" marR="54864" marT="18288" marB="18288" anchor="ctr">
+                    <a:solidFill>
+                      <a:srgbClr val="F1ECE2"/>
                     </a:solidFill>
                   </a:tcPr>
                 </a:tc>
@@ -4120,13 +4534,13 @@
                           </a:solidFill>
                           <a:latin typeface="Helvetica Neue"/>
                         </a:rPr>
-                        <a:t>list-price estimate, fully journaled</a:t>
-                      </a:r>
-                    </a:p>
-                  </a:txBody>
-                  <a:tcPr marL="54864" marR="54864" marT="18288" marB="18288" anchor="ctr">
-                    <a:solidFill>
-                      <a:srgbClr val="FAF7F2"/>
+                        <a:t>illustrative profile — charged $0.00</a:t>
+                      </a:r>
+                    </a:p>
+                  </a:txBody>
+                  <a:tcPr marL="54864" marR="54864" marT="18288" marB="18288" anchor="ctr">
+                    <a:solidFill>
+                      <a:srgbClr val="F1ECE2"/>
                     </a:solidFill>
                   </a:tcPr>
                 </a:tc>
@@ -5092,7 +5506,7 @@
                 </a:solidFill>
                 <a:latin typeface="Helvetica Neue"/>
               </a:rPr>
-              <a:t>•  claude-fable-5: 27 calls, $0.00</a:t>
+              <a:t>•  claude-fable-5: 33 calls, $7.74</a:t>
             </a:r>
           </a:p>
           <a:p>
@@ -5108,7 +5522,7 @@
                 </a:solidFill>
                 <a:latin typeface="Helvetica Neue"/>
               </a:rPr>
-              <a:t>•  claude-haiku-4-5: 9 calls, $0.00</a:t>
+              <a:t>•  claude-haiku-4-5: 9 calls, $0.07</a:t>
             </a:r>
           </a:p>
           <a:p>
@@ -5124,7 +5538,23 @@
                 </a:solidFill>
                 <a:latin typeface="Helvetica Neue"/>
               </a:rPr>
-              <a:t>•  claude-opus-5: 11 calls, $0.00</a:t>
+              <a:t>•  claude-opus-5: 11 calls, $2.03</a:t>
+            </a:r>
+          </a:p>
+          <a:p>
+            <a:pPr algn="l">
+              <a:spcBef>
+                <a:spcPts val="200"/>
+              </a:spcBef>
+            </a:pPr>
+            <a:r>
+              <a:rPr sz="850" b="0">
+                <a:solidFill>
+                  <a:srgbClr val="1F2430"/>
+                </a:solidFill>
+                <a:latin typeface="Helvetica Neue"/>
+              </a:rPr>
+              <a:t>•  claude-sonnet-5: 9 calls, $0.39</a:t>
             </a:r>
           </a:p>
         </p:txBody>
@@ -5181,7 +5611,7 @@
                 </a:solidFill>
                 <a:latin typeface="Helvetica Neue"/>
               </a:rPr>
-              <a:t>EMPATHIZE · OUTPUT</a:t>
+              <a:t>OBSERVED · FUNCTIONAL UI TESTS</a:t>
             </a:r>
           </a:p>
         </p:txBody>
@@ -5220,7 +5650,7 @@
                 </a:solidFill>
                 <a:latin typeface="Helvetica Neue"/>
               </a:rPr>
-              <a:t>Where the underserved demand is (Ulwick-scored)</a:t>
+              <a:t>4 features exercised in a real browser — 1 broken</a:t>
             </a:r>
           </a:p>
         </p:txBody>
@@ -5260,6 +5690,571 @@
                 <a:latin typeface="Helvetica Neue"/>
               </a:rPr>
               <a:t>Bokken · session gallery — generated from the Journal, no manual edits        03</a:t>
+            </a:r>
+          </a:p>
+        </p:txBody>
+      </p:sp>
+      <p:graphicFrame>
+        <p:nvGraphicFramePr>
+          <p:cNvPr id="5" name="Table 4"/>
+          <p:cNvGraphicFramePr>
+            <a:graphicFrameLocks noGrp="1"/>
+          </p:cNvGraphicFramePr>
+          <p:nvPr/>
+        </p:nvGraphicFramePr>
+        <p:xfrm>
+          <a:off x="548640" y="1463040"/>
+          <a:ext cx="7589520" cy="2651760"/>
+        </p:xfrm>
+        <a:graphic>
+          <a:graphicData uri="http://schemas.openxmlformats.org/drawingml/2006/table">
+            <a:tbl>
+              <a:tblPr firstRow="1" bandRow="1">
+                <a:tableStyleId>{5C22544A-7EE6-4342-B048-85BDC9FD1C3A}</a:tableStyleId>
+              </a:tblPr>
+              <a:tblGrid>
+                <a:gridCol w="2103120"/>
+                <a:gridCol w="914400"/>
+                <a:gridCol w="4572000"/>
+              </a:tblGrid>
+              <a:tr h="530352">
+                <a:tc>
+                  <a:txBody>
+                    <a:bodyPr wrap="square"/>
+                    <a:lstStyle/>
+                    <a:p>
+                      <a:r>
+                        <a:rPr sz="1000" b="1">
+                          <a:solidFill>
+                            <a:srgbClr val="FFFFFF"/>
+                          </a:solidFill>
+                          <a:latin typeface="Helvetica Neue"/>
+                        </a:rPr>
+                        <a:t>Feature</a:t>
+                      </a:r>
+                    </a:p>
+                  </a:txBody>
+                  <a:tcPr marL="54864" marR="54864" marT="18288" marB="18288" anchor="ctr">
+                    <a:solidFill>
+                      <a:srgbClr val="1F2430"/>
+                    </a:solidFill>
+                  </a:tcPr>
+                </a:tc>
+                <a:tc>
+                  <a:txBody>
+                    <a:bodyPr wrap="square"/>
+                    <a:lstStyle/>
+                    <a:p>
+                      <a:r>
+                        <a:rPr sz="1000" b="1">
+                          <a:solidFill>
+                            <a:srgbClr val="FFFFFF"/>
+                          </a:solidFill>
+                          <a:latin typeface="Helvetica Neue"/>
+                        </a:rPr>
+                        <a:t>Verdict</a:t>
+                      </a:r>
+                    </a:p>
+                  </a:txBody>
+                  <a:tcPr marL="54864" marR="54864" marT="18288" marB="18288" anchor="ctr">
+                    <a:solidFill>
+                      <a:srgbClr val="1F2430"/>
+                    </a:solidFill>
+                  </a:tcPr>
+                </a:tc>
+                <a:tc>
+                  <a:txBody>
+                    <a:bodyPr wrap="square"/>
+                    <a:lstStyle/>
+                    <a:p>
+                      <a:r>
+                        <a:rPr sz="1000" b="1">
+                          <a:solidFill>
+                            <a:srgbClr val="FFFFFF"/>
+                          </a:solidFill>
+                          <a:latin typeface="Helvetica Neue"/>
+                        </a:rPr>
+                        <a:t>Finding (observed)</a:t>
+                      </a:r>
+                    </a:p>
+                  </a:txBody>
+                  <a:tcPr marL="54864" marR="54864" marT="18288" marB="18288" anchor="ctr">
+                    <a:solidFill>
+                      <a:srgbClr val="1F2430"/>
+                    </a:solidFill>
+                  </a:tcPr>
+                </a:tc>
+              </a:tr>
+              <a:tr h="530352">
+                <a:tc>
+                  <a:txBody>
+                    <a:bodyPr wrap="square"/>
+                    <a:lstStyle/>
+                    <a:p>
+                      <a:r>
+                        <a:rPr sz="950" b="0">
+                          <a:solidFill>
+                            <a:srgbClr val="1F2430"/>
+                          </a:solidFill>
+                          <a:latin typeface="Helvetica Neue"/>
+                        </a:rPr>
+                        <a:t>Cambiar a una van más puntual</a:t>
+                      </a:r>
+                    </a:p>
+                  </a:txBody>
+                  <a:tcPr marL="54864" marR="54864" marT="18288" marB="18288" anchor="ctr">
+                    <a:solidFill>
+                      <a:srgbClr val="FAF7F2"/>
+                    </a:solidFill>
+                  </a:tcPr>
+                </a:tc>
+                <a:tc>
+                  <a:txBody>
+                    <a:bodyPr wrap="square"/>
+                    <a:lstStyle/>
+                    <a:p>
+                      <a:r>
+                        <a:rPr sz="950" b="1">
+                          <a:solidFill>
+                            <a:srgbClr val="2F6F4E"/>
+                          </a:solidFill>
+                          <a:latin typeface="Helvetica Neue"/>
+                        </a:rPr>
+                        <a:t>works</a:t>
+                      </a:r>
+                    </a:p>
+                  </a:txBody>
+                  <a:tcPr marL="54864" marR="54864" marT="18288" marB="18288" anchor="ctr">
+                    <a:solidFill>
+                      <a:srgbClr val="FAF7F2"/>
+                    </a:solidFill>
+                  </a:tcPr>
+                </a:tc>
+                <a:tc>
+                  <a:txBody>
+                    <a:bodyPr wrap="square"/>
+                    <a:lstStyle/>
+                    <a:p>
+                      <a:r>
+                        <a:rPr sz="950" b="0">
+                          <a:solidFill>
+                            <a:srgbClr val="1F2430"/>
+                          </a:solidFill>
+                          <a:latin typeface="Helvetica Neue"/>
+                        </a:rPr>
+                        <a:t>The switch responds instantly and confirms inline ('mañana te recoge la van de las 07:20') without leaving the</a:t>
+                      </a:r>
+                    </a:p>
+                  </a:txBody>
+                  <a:tcPr marL="54864" marR="54864" marT="18288" marB="18288" anchor="ctr">
+                    <a:solidFill>
+                      <a:srgbClr val="FAF7F2"/>
+                    </a:solidFill>
+                  </a:tcPr>
+                </a:tc>
+              </a:tr>
+              <a:tr h="530352">
+                <a:tc>
+                  <a:txBody>
+                    <a:bodyPr wrap="square"/>
+                    <a:lstStyle/>
+                    <a:p>
+                      <a:r>
+                        <a:rPr sz="950" b="0">
+                          <a:solidFill>
+                            <a:srgbClr val="1F2430"/>
+                          </a:solidFill>
+                          <a:latin typeface="Helvetica Neue"/>
+                        </a:rPr>
+                        <a:t>Reservar un asiento</a:t>
+                      </a:r>
+                    </a:p>
+                  </a:txBody>
+                  <a:tcPr marL="54864" marR="54864" marT="18288" marB="18288" anchor="ctr">
+                    <a:solidFill>
+                      <a:srgbClr val="F1ECE2"/>
+                    </a:solidFill>
+                  </a:tcPr>
+                </a:tc>
+                <a:tc>
+                  <a:txBody>
+                    <a:bodyPr wrap="square"/>
+                    <a:lstStyle/>
+                    <a:p>
+                      <a:r>
+                        <a:rPr sz="950" b="1">
+                          <a:solidFill>
+                            <a:srgbClr val="2F6F4E"/>
+                          </a:solidFill>
+                          <a:latin typeface="Helvetica Neue"/>
+                        </a:rPr>
+                        <a:t>works</a:t>
+                      </a:r>
+                    </a:p>
+                  </a:txBody>
+                  <a:tcPr marL="54864" marR="54864" marT="18288" marB="18288" anchor="ctr">
+                    <a:solidFill>
+                      <a:srgbClr val="F1ECE2"/>
+                    </a:solidFill>
+                  </a:tcPr>
+                </a:tc>
+                <a:tc>
+                  <a:txBody>
+                    <a:bodyPr wrap="square"/>
+                    <a:lstStyle/>
+                    <a:p>
+                      <a:r>
+                        <a:rPr sz="950" b="0">
+                          <a:solidFill>
+                            <a:srgbClr val="1F2430"/>
+                          </a:solidFill>
+                          <a:latin typeface="Helvetica Neue"/>
+                        </a:rPr>
+                        <a:t>Day and van selectors plus one confirm tap; the confirmation promises the 21:00 notice, which is the right mom</a:t>
+                      </a:r>
+                    </a:p>
+                  </a:txBody>
+                  <a:tcPr marL="54864" marR="54864" marT="18288" marB="18288" anchor="ctr">
+                    <a:solidFill>
+                      <a:srgbClr val="F1ECE2"/>
+                    </a:solidFill>
+                  </a:tcPr>
+                </a:tc>
+              </a:tr>
+              <a:tr h="530352">
+                <a:tc>
+                  <a:txBody>
+                    <a:bodyPr wrap="square"/>
+                    <a:lstStyle/>
+                    <a:p>
+                      <a:r>
+                        <a:rPr sz="950" b="0">
+                          <a:solidFill>
+                            <a:srgbClr val="1F2430"/>
+                          </a:solidFill>
+                          <a:latin typeface="Helvetica Neue"/>
+                        </a:rPr>
+                        <a:t>Indicador de puntualidad de ayer</a:t>
+                      </a:r>
+                    </a:p>
+                  </a:txBody>
+                  <a:tcPr marL="54864" marR="54864" marT="18288" marB="18288" anchor="ctr">
+                    <a:solidFill>
+                      <a:srgbClr val="FAF7F2"/>
+                    </a:solidFill>
+                  </a:tcPr>
+                </a:tc>
+                <a:tc>
+                  <a:txBody>
+                    <a:bodyPr wrap="square"/>
+                    <a:lstStyle/>
+                    <a:p>
+                      <a:r>
+                        <a:rPr sz="950" b="1">
+                          <a:solidFill>
+                            <a:srgbClr val="C73E3A"/>
+                          </a:solidFill>
+                          <a:latin typeface="Helvetica Neue"/>
+                        </a:rPr>
+                        <a:t>broken</a:t>
+                      </a:r>
+                    </a:p>
+                  </a:txBody>
+                  <a:tcPr marL="54864" marR="54864" marT="18288" marB="18288" anchor="ctr">
+                    <a:solidFill>
+                      <a:srgbClr val="FAF7F2"/>
+                    </a:solidFill>
+                  </a:tcPr>
+                </a:tc>
+                <a:tc>
+                  <a:txBody>
+                    <a:bodyPr wrap="square"/>
+                    <a:lstStyle/>
+                    <a:p>
+                      <a:r>
+                        <a:rPr sz="950" b="0">
+                          <a:solidFill>
+                            <a:srgbClr val="1F2430"/>
+                          </a:solidFill>
+                          <a:latin typeface="Helvetica Neue"/>
+                        </a:rPr>
+                        <a:t>The card shows a green 'Ventana cumplida' tick directly above a notice that the arrival alert went out 9 minut</a:t>
+                      </a:r>
+                    </a:p>
+                  </a:txBody>
+                  <a:tcPr marL="54864" marR="54864" marT="18288" marB="18288" anchor="ctr">
+                    <a:solidFill>
+                      <a:srgbClr val="FAF7F2"/>
+                    </a:solidFill>
+                  </a:tcPr>
+                </a:tc>
+              </a:tr>
+              <a:tr h="530352">
+                <a:tc>
+                  <a:txBody>
+                    <a:bodyPr wrap="square"/>
+                    <a:lstStyle/>
+                    <a:p>
+                      <a:r>
+                        <a:rPr sz="950" b="0">
+                          <a:solidFill>
+                            <a:srgbClr val="1F2430"/>
+                          </a:solidFill>
+                          <a:latin typeface="Helvetica Neue"/>
+                        </a:rPr>
+                        <a:t>Aviso de las 21:00 (ajustes)</a:t>
+                      </a:r>
+                    </a:p>
+                  </a:txBody>
+                  <a:tcPr marL="54864" marR="54864" marT="18288" marB="18288" anchor="ctr">
+                    <a:solidFill>
+                      <a:srgbClr val="F1ECE2"/>
+                    </a:solidFill>
+                  </a:tcPr>
+                </a:tc>
+                <a:tc>
+                  <a:txBody>
+                    <a:bodyPr wrap="square"/>
+                    <a:lstStyle/>
+                    <a:p>
+                      <a:r>
+                        <a:rPr sz="950" b="1">
+                          <a:solidFill>
+                            <a:srgbClr val="6B7280"/>
+                          </a:solidFill>
+                          <a:latin typeface="Helvetica Neue"/>
+                        </a:rPr>
+                        <a:t>unclear</a:t>
+                      </a:r>
+                    </a:p>
+                  </a:txBody>
+                  <a:tcPr marL="54864" marR="54864" marT="18288" marB="18288" anchor="ctr">
+                    <a:solidFill>
+                      <a:srgbClr val="F1ECE2"/>
+                    </a:solidFill>
+                  </a:tcPr>
+                </a:tc>
+                <a:tc>
+                  <a:txBody>
+                    <a:bodyPr wrap="square"/>
+                    <a:lstStyle/>
+                    <a:p>
+                      <a:r>
+                        <a:rPr sz="950" b="0">
+                          <a:solidFill>
+                            <a:srgbClr val="1F2430"/>
+                          </a:solidFill>
+                          <a:latin typeface="Helvetica Neue"/>
+                        </a:rPr>
+                        <a:t>The opt-in checkbox exists, but its state does not visibly persist when switching views, so whether the prefer</a:t>
+                      </a:r>
+                    </a:p>
+                  </a:txBody>
+                  <a:tcPr marL="54864" marR="54864" marT="18288" marB="18288" anchor="ctr">
+                    <a:solidFill>
+                      <a:srgbClr val="F1ECE2"/>
+                    </a:solidFill>
+                  </a:tcPr>
+                </a:tc>
+              </a:tr>
+            </a:tbl>
+          </a:graphicData>
+        </a:graphic>
+      </p:graphicFrame>
+      <p:pic>
+        <p:nvPicPr>
+          <p:cNvPr id="6" name="Picture 5" descr="feature_03.png"/>
+          <p:cNvPicPr>
+            <a:picLocks noChangeAspect="1"/>
+          </p:cNvPicPr>
+          <p:nvPr/>
+        </p:nvPicPr>
+        <p:blipFill>
+          <a:blip r:embed="rId2"/>
+          <a:stretch>
+            <a:fillRect/>
+          </a:stretch>
+        </p:blipFill>
+        <p:spPr>
+          <a:xfrm>
+            <a:off x="8321040" y="1463040"/>
+            <a:ext cx="3291840" cy="2314575"/>
+          </a:xfrm>
+          <a:prstGeom prst="rect">
+            <a:avLst/>
+          </a:prstGeom>
+        </p:spPr>
+      </p:pic>
+      <p:sp>
+        <p:nvSpPr>
+          <p:cNvPr id="7" name="TextBox 6"/>
+          <p:cNvSpPr txBox="1"/>
+          <p:nvPr/>
+        </p:nvSpPr>
+        <p:spPr>
+          <a:xfrm>
+            <a:off x="8321040" y="3977639"/>
+            <a:ext cx="3291840" cy="365760"/>
+          </a:xfrm>
+          <a:prstGeom prst="rect">
+            <a:avLst/>
+          </a:prstGeom>
+          <a:noFill/>
+        </p:spPr>
+        <p:txBody>
+          <a:bodyPr wrap="square">
+            <a:spAutoFit/>
+          </a:bodyPr>
+          <a:lstStyle/>
+          <a:p>
+            <a:pPr algn="l">
+              <a:spcBef>
+                <a:spcPts val="0"/>
+              </a:spcBef>
+            </a:pPr>
+            <a:r>
+              <a:rPr sz="800" b="0">
+                <a:solidFill>
+                  <a:srgbClr val="6B7280"/>
+                </a:solidFill>
+                <a:latin typeface="Helvetica Neue"/>
+              </a:rPr>
+              <a:t>End state of a broken feature (observed)</a:t>
+            </a:r>
+          </a:p>
+        </p:txBody>
+      </p:sp>
+    </p:spTree>
+  </p:cSld>
+  <p:clrMapOvr>
+    <a:masterClrMapping/>
+  </p:clrMapOvr>
+</p:sld>
+</file>
+
+<file path=ppt/slides/slide5.xml><?xml version="1.0" encoding="utf-8"?>
+<p:sld xmlns:a="http://schemas.openxmlformats.org/drawingml/2006/main" xmlns:p="http://schemas.openxmlformats.org/presentationml/2006/main" xmlns:r="http://schemas.openxmlformats.org/officeDocument/2006/relationships">
+  <p:cSld>
+    <p:spTree>
+      <p:nvGrpSpPr>
+        <p:cNvPr id="1" name=""/>
+        <p:cNvGrpSpPr/>
+        <p:nvPr/>
+      </p:nvGrpSpPr>
+      <p:grpSpPr/>
+      <p:sp>
+        <p:nvSpPr>
+          <p:cNvPr id="2" name="TextBox 1"/>
+          <p:cNvSpPr txBox="1"/>
+          <p:nvPr/>
+        </p:nvSpPr>
+        <p:spPr>
+          <a:xfrm>
+            <a:off x="548640" y="365760"/>
+            <a:ext cx="11091672" cy="274320"/>
+          </a:xfrm>
+          <a:prstGeom prst="rect">
+            <a:avLst/>
+          </a:prstGeom>
+          <a:noFill/>
+        </p:spPr>
+        <p:txBody>
+          <a:bodyPr wrap="square">
+            <a:spAutoFit/>
+          </a:bodyPr>
+          <a:lstStyle/>
+          <a:p>
+            <a:pPr algn="l">
+              <a:spcBef>
+                <a:spcPts val="0"/>
+              </a:spcBef>
+            </a:pPr>
+            <a:r>
+              <a:rPr sz="1100" b="1">
+                <a:solidFill>
+                  <a:srgbClr val="C73E3A"/>
+                </a:solidFill>
+                <a:latin typeface="Helvetica Neue"/>
+              </a:rPr>
+              <a:t>EMPATHIZE · OUTPUT</a:t>
+            </a:r>
+          </a:p>
+        </p:txBody>
+      </p:sp>
+      <p:sp>
+        <p:nvSpPr>
+          <p:cNvPr id="3" name="TextBox 2"/>
+          <p:cNvSpPr txBox="1"/>
+          <p:nvPr/>
+        </p:nvSpPr>
+        <p:spPr>
+          <a:xfrm>
+            <a:off x="548640" y="658368"/>
+            <a:ext cx="11091672" cy="640080"/>
+          </a:xfrm>
+          <a:prstGeom prst="rect">
+            <a:avLst/>
+          </a:prstGeom>
+          <a:noFill/>
+        </p:spPr>
+        <p:txBody>
+          <a:bodyPr wrap="square">
+            <a:spAutoFit/>
+          </a:bodyPr>
+          <a:lstStyle/>
+          <a:p>
+            <a:pPr algn="l">
+              <a:spcBef>
+                <a:spcPts val="0"/>
+              </a:spcBef>
+            </a:pPr>
+            <a:r>
+              <a:rPr sz="2500" b="1">
+                <a:solidFill>
+                  <a:srgbClr val="1F2430"/>
+                </a:solidFill>
+                <a:latin typeface="Helvetica Neue"/>
+              </a:rPr>
+              <a:t>Where the underserved demand is (Ulwick-scored)</a:t>
+            </a:r>
+          </a:p>
+        </p:txBody>
+      </p:sp>
+      <p:sp>
+        <p:nvSpPr>
+          <p:cNvPr id="4" name="TextBox 3"/>
+          <p:cNvSpPr txBox="1"/>
+          <p:nvPr/>
+        </p:nvSpPr>
+        <p:spPr>
+          <a:xfrm>
+            <a:off x="548640" y="6473952"/>
+            <a:ext cx="11091672" cy="274320"/>
+          </a:xfrm>
+          <a:prstGeom prst="rect">
+            <a:avLst/>
+          </a:prstGeom>
+          <a:noFill/>
+        </p:spPr>
+        <p:txBody>
+          <a:bodyPr wrap="square">
+            <a:spAutoFit/>
+          </a:bodyPr>
+          <a:lstStyle/>
+          <a:p>
+            <a:pPr algn="l">
+              <a:spcBef>
+                <a:spcPts val="0"/>
+              </a:spcBef>
+            </a:pPr>
+            <a:r>
+              <a:rPr sz="800" b="0">
+                <a:solidFill>
+                  <a:srgbClr val="6B7280"/>
+                </a:solidFill>
+                <a:latin typeface="Helvetica Neue"/>
+              </a:rPr>
+              <a:t>Bokken · session gallery — generated from the Journal, no manual edits        04</a:t>
             </a:r>
           </a:p>
         </p:txBody>
@@ -6059,7 +7054,7 @@
 </p:sld>
 </file>
 
-<file path=ppt/slides/slide5.xml><?xml version="1.0" encoding="utf-8"?>
+<file path=ppt/slides/slide6.xml><?xml version="1.0" encoding="utf-8"?>
 <p:sld xmlns:a="http://schemas.openxmlformats.org/drawingml/2006/main" xmlns:p="http://schemas.openxmlformats.org/presentationml/2006/main" xmlns:r="http://schemas.openxmlformats.org/officeDocument/2006/relationships">
   <p:cSld>
     <p:spTree>
@@ -6181,7 +7176,7 @@
                 </a:solidFill>
                 <a:latin typeface="Helvetica Neue"/>
               </a:rPr>
-              <a:t>Bokken · session gallery — generated from the Journal, no manual edits        04</a:t>
+              <a:t>Bokken · session gallery — generated from the Journal, no manual edits        05</a:t>
             </a:r>
           </a:p>
         </p:txBody>
@@ -6376,7 +7371,7 @@
                 </a:solidFill>
                 <a:latin typeface="Helvetica Neue"/>
               </a:rPr>
-              <a:t>•  feasibility: red verdict on b618fc2dcd454bd0933a6c004f44fcfa: verdict red, effort L - A rider-voted pickup map fights the optimizer head-on; every vote becomes a c</a:t>
+              <a:t>•  feasibility: red verdict on e0fd5940e71e4d0d8fff1b727aa34dff: verdict red, effort L - A rider-voted pickup map fights the optimizer head-on; every vote becomes a c</a:t>
             </a:r>
           </a:p>
         </p:txBody>
@@ -6442,7 +7437,7 @@
 </p:sld>
 </file>
 
-<file path=ppt/slides/slide6.xml><?xml version="1.0" encoding="utf-8"?>
+<file path=ppt/slides/slide7.xml><?xml version="1.0" encoding="utf-8"?>
 <p:sld xmlns:a="http://schemas.openxmlformats.org/drawingml/2006/main" xmlns:p="http://schemas.openxmlformats.org/presentationml/2006/main" xmlns:r="http://schemas.openxmlformats.org/officeDocument/2006/relationships">
   <p:cSld>
     <p:spTree>
@@ -6564,7 +7559,7 @@
                 </a:solidFill>
                 <a:latin typeface="Helvetica Neue"/>
               </a:rPr>
-              <a:t>Bokken · session gallery — generated from the Journal, no manual edits        05</a:t>
+              <a:t>Bokken · session gallery — generated from the Journal, no manual edits        06</a:t>
             </a:r>
           </a:p>
         </p:txBody>
@@ -6895,7 +7890,7 @@
 </p:sld>
 </file>
 
-<file path=ppt/slides/slide7.xml><?xml version="1.0" encoding="utf-8"?>
+<file path=ppt/slides/slide8.xml><?xml version="1.0" encoding="utf-8"?>
 <p:sld xmlns:a="http://schemas.openxmlformats.org/drawingml/2006/main" xmlns:p="http://schemas.openxmlformats.org/presentationml/2006/main" xmlns:r="http://schemas.openxmlformats.org/officeDocument/2006/relationships">
   <p:cSld>
     <p:spTree>
@@ -7017,7 +8012,7 @@
                 </a:solidFill>
                 <a:latin typeface="Helvetica Neue"/>
               </a:rPr>
-              <a:t>Bokken · session gallery — generated from the Journal, no manual edits        06</a:t>
+              <a:t>Bokken · session gallery — generated from the Journal, no manual edits        07</a:t>
             </a:r>
           </a:p>
         </p:txBody>
@@ -7737,7 +8732,7 @@
 </p:sld>
 </file>
 
-<file path=ppt/slides/slide8.xml><?xml version="1.0" encoding="utf-8"?>
+<file path=ppt/slides/slide9.xml><?xml version="1.0" encoding="utf-8"?>
 <p:sld xmlns:a="http://schemas.openxmlformats.org/drawingml/2006/main" xmlns:p="http://schemas.openxmlformats.org/presentationml/2006/main" xmlns:r="http://schemas.openxmlformats.org/officeDocument/2006/relationships">
   <p:cSld>
     <p:spTree>
@@ -7859,7 +8854,7 @@
                 </a:solidFill>
                 <a:latin typeface="Helvetica Neue"/>
               </a:rPr>
-              <a:t>Bokken · session gallery — generated from the Journal, no manual edits        07</a:t>
+              <a:t>Bokken · session gallery — generated from the Journal, no manual edits        08</a:t>
             </a:r>
           </a:p>
         </p:txBody>
@@ -8134,351 +9129,6 @@
           </a:p>
         </p:txBody>
       </p:sp>
-    </p:spTree>
-  </p:cSld>
-  <p:clrMapOvr>
-    <a:masterClrMapping/>
-  </p:clrMapOvr>
-</p:sld>
-</file>
-
-<file path=ppt/slides/slide9.xml><?xml version="1.0" encoding="utf-8"?>
-<p:sld xmlns:a="http://schemas.openxmlformats.org/drawingml/2006/main" xmlns:p="http://schemas.openxmlformats.org/presentationml/2006/main" xmlns:r="http://schemas.openxmlformats.org/officeDocument/2006/relationships">
-  <p:cSld>
-    <p:spTree>
-      <p:nvGrpSpPr>
-        <p:cNvPr id="1" name=""/>
-        <p:cNvGrpSpPr/>
-        <p:nvPr/>
-      </p:nvGrpSpPr>
-      <p:grpSpPr/>
-      <p:sp>
-        <p:nvSpPr>
-          <p:cNvPr id="2" name="TextBox 1"/>
-          <p:cNvSpPr txBox="1"/>
-          <p:nvPr/>
-        </p:nvSpPr>
-        <p:spPr>
-          <a:xfrm>
-            <a:off x="548640" y="365760"/>
-            <a:ext cx="11091672" cy="274320"/>
-          </a:xfrm>
-          <a:prstGeom prst="rect">
-            <a:avLst/>
-          </a:prstGeom>
-          <a:noFill/>
-        </p:spPr>
-        <p:txBody>
-          <a:bodyPr wrap="square">
-            <a:spAutoFit/>
-          </a:bodyPr>
-          <a:lstStyle/>
-          <a:p>
-            <a:pPr algn="l">
-              <a:spcBef>
-                <a:spcPts val="0"/>
-              </a:spcBef>
-            </a:pPr>
-            <a:r>
-              <a:rPr sz="1100" b="1">
-                <a:solidFill>
-                  <a:srgbClr val="C73E3A"/>
-                </a:solidFill>
-                <a:latin typeface="Helvetica Neue"/>
-              </a:rPr>
-              <a:t>ACTION ORIENTED</a:t>
-            </a:r>
-          </a:p>
-        </p:txBody>
-      </p:sp>
-      <p:sp>
-        <p:nvSpPr>
-          <p:cNvPr id="3" name="TextBox 2"/>
-          <p:cNvSpPr txBox="1"/>
-          <p:nvPr/>
-        </p:nvSpPr>
-        <p:spPr>
-          <a:xfrm>
-            <a:off x="548640" y="658368"/>
-            <a:ext cx="11091672" cy="640080"/>
-          </a:xfrm>
-          <a:prstGeom prst="rect">
-            <a:avLst/>
-          </a:prstGeom>
-          <a:noFill/>
-        </p:spPr>
-        <p:txBody>
-          <a:bodyPr wrap="square">
-            <a:spAutoFit/>
-          </a:bodyPr>
-          <a:lstStyle/>
-          <a:p>
-            <a:pPr algn="l">
-              <a:spcBef>
-                <a:spcPts val="0"/>
-              </a:spcBef>
-            </a:pPr>
-            <a:r>
-              <a:rPr sz="2500" b="1">
-                <a:solidFill>
-                  <a:srgbClr val="1F2430"/>
-                </a:solidFill>
-                <a:latin typeface="Helvetica Neue"/>
-              </a:rPr>
-              <a:t>What to do next, in order</a:t>
-            </a:r>
-          </a:p>
-        </p:txBody>
-      </p:sp>
-      <p:sp>
-        <p:nvSpPr>
-          <p:cNvPr id="4" name="TextBox 3"/>
-          <p:cNvSpPr txBox="1"/>
-          <p:nvPr/>
-        </p:nvSpPr>
-        <p:spPr>
-          <a:xfrm>
-            <a:off x="548640" y="6473952"/>
-            <a:ext cx="11091672" cy="274320"/>
-          </a:xfrm>
-          <a:prstGeom prst="rect">
-            <a:avLst/>
-          </a:prstGeom>
-          <a:noFill/>
-        </p:spPr>
-        <p:txBody>
-          <a:bodyPr wrap="square">
-            <a:spAutoFit/>
-          </a:bodyPr>
-          <a:lstStyle/>
-          <a:p>
-            <a:pPr algn="l">
-              <a:spcBef>
-                <a:spcPts val="0"/>
-              </a:spcBef>
-            </a:pPr>
-            <a:r>
-              <a:rPr sz="800" b="0">
-                <a:solidFill>
-                  <a:srgbClr val="6B7280"/>
-                </a:solidFill>
-                <a:latin typeface="Helvetica Neue"/>
-              </a:rPr>
-              <a:t>Bokken · session gallery — generated from the Journal, no manual edits        08</a:t>
-            </a:r>
-          </a:p>
-        </p:txBody>
-      </p:sp>
-      <p:graphicFrame>
-        <p:nvGraphicFramePr>
-          <p:cNvPr id="5" name="Table 4"/>
-          <p:cNvGraphicFramePr>
-            <a:graphicFrameLocks noGrp="1"/>
-          </p:cNvGraphicFramePr>
-          <p:nvPr/>
-        </p:nvGraphicFramePr>
-        <p:xfrm>
-          <a:off x="548640" y="1463040"/>
-          <a:ext cx="11091672" cy="2487168"/>
-        </p:xfrm>
-        <a:graphic>
-          <a:graphicData uri="http://schemas.openxmlformats.org/drawingml/2006/table">
-            <a:tbl>
-              <a:tblPr firstRow="1" bandRow="1">
-                <a:tableStyleId>{5C22544A-7EE6-4342-B048-85BDC9FD1C3A}</a:tableStyleId>
-              </a:tblPr>
-              <a:tblGrid>
-                <a:gridCol w="548640"/>
-                <a:gridCol w="10543032"/>
-              </a:tblGrid>
-              <a:tr h="621792">
-                <a:tc>
-                  <a:txBody>
-                    <a:bodyPr wrap="square"/>
-                    <a:lstStyle/>
-                    <a:p>
-                      <a:r>
-                        <a:rPr sz="1000" b="1">
-                          <a:solidFill>
-                            <a:srgbClr val="FFFFFF"/>
-                          </a:solidFill>
-                          <a:latin typeface="Helvetica Neue"/>
-                        </a:rPr>
-                        <a:t>#</a:t>
-                      </a:r>
-                    </a:p>
-                  </a:txBody>
-                  <a:tcPr marL="54864" marR="54864" marT="18288" marB="18288" anchor="ctr">
-                    <a:solidFill>
-                      <a:srgbClr val="1F2430"/>
-                    </a:solidFill>
-                  </a:tcPr>
-                </a:tc>
-                <a:tc>
-                  <a:txBody>
-                    <a:bodyPr wrap="square"/>
-                    <a:lstStyle/>
-                    <a:p>
-                      <a:r>
-                        <a:rPr sz="1000" b="1">
-                          <a:solidFill>
-                            <a:srgbClr val="FFFFFF"/>
-                          </a:solidFill>
-                          <a:latin typeface="Helvetica Neue"/>
-                        </a:rPr>
-                        <a:t>Action</a:t>
-                      </a:r>
-                    </a:p>
-                  </a:txBody>
-                  <a:tcPr marL="54864" marR="54864" marT="18288" marB="18288" anchor="ctr">
-                    <a:solidFill>
-                      <a:srgbClr val="1F2430"/>
-                    </a:solidFill>
-                  </a:tcPr>
-                </a:tc>
-              </a:tr>
-              <a:tr h="621792">
-                <a:tc>
-                  <a:txBody>
-                    <a:bodyPr wrap="square"/>
-                    <a:lstStyle/>
-                    <a:p>
-                      <a:r>
-                        <a:rPr sz="950" b="0">
-                          <a:solidFill>
-                            <a:srgbClr val="1F2430"/>
-                          </a:solidFill>
-                          <a:latin typeface="Helvetica Neue"/>
-                        </a:rPr>
-                        <a:t>1</a:t>
-                      </a:r>
-                    </a:p>
-                  </a:txBody>
-                  <a:tcPr marL="54864" marR="54864" marT="18288" marB="18288" anchor="ctr">
-                    <a:solidFill>
-                      <a:srgbClr val="FAF7F2"/>
-                    </a:solidFill>
-                  </a:tcPr>
-                </a:tc>
-                <a:tc>
-                  <a:txBody>
-                    <a:bodyPr wrap="square"/>
-                    <a:lstStyle/>
-                    <a:p>
-                      <a:r>
-                        <a:rPr sz="950" b="0">
-                          <a:solidFill>
-                            <a:srgbClr val="1F2430"/>
-                          </a:solidFill>
-                          <a:latin typeface="Helvetica Neue"/>
-                        </a:rPr>
-                        <a:t>Address the test contradiction: A test result contradicts earlier work: the 'honesty reduces churn' assumption is contradicted by the same evidence that supports dem</a:t>
-                      </a:r>
-                    </a:p>
-                  </a:txBody>
-                  <a:tcPr marL="54864" marR="54864" marT="18288" marB="18288" anchor="ctr">
-                    <a:solidFill>
-                      <a:srgbClr val="FAF7F2"/>
-                    </a:solidFill>
-                  </a:tcPr>
-                </a:tc>
-              </a:tr>
-              <a:tr h="621792">
-                <a:tc>
-                  <a:txBody>
-                    <a:bodyPr wrap="square"/>
-                    <a:lstStyle/>
-                    <a:p>
-                      <a:r>
-                        <a:rPr sz="950" b="0">
-                          <a:solidFill>
-                            <a:srgbClr val="1F2430"/>
-                          </a:solidFill>
-                          <a:latin typeface="Helvetica Neue"/>
-                        </a:rPr>
-                        <a:t>2</a:t>
-                      </a:r>
-                    </a:p>
-                  </a:txBody>
-                  <a:tcPr marL="54864" marR="54864" marT="18288" marB="18288" anchor="ctr">
-                    <a:solidFill>
-                      <a:srgbClr val="F1ECE2"/>
-                    </a:solidFill>
-                  </a:tcPr>
-                </a:tc>
-                <a:tc>
-                  <a:txBody>
-                    <a:bodyPr wrap="square"/>
-                    <a:lstStyle/>
-                    <a:p>
-                      <a:r>
-                        <a:rPr sz="950" b="0">
-                          <a:solidFill>
-                            <a:srgbClr val="1F2430"/>
-                          </a:solidFill>
-                          <a:latin typeface="Helvetica Neue"/>
-                        </a:rPr>
-                        <a:t>Recommendation is 'iterate': validate the supported assumptions with real users before building.</a:t>
-                      </a:r>
-                    </a:p>
-                  </a:txBody>
-                  <a:tcPr marL="54864" marR="54864" marT="18288" marB="18288" anchor="ctr">
-                    <a:solidFill>
-                      <a:srgbClr val="F1ECE2"/>
-                    </a:solidFill>
-                  </a:tcPr>
-                </a:tc>
-              </a:tr>
-              <a:tr h="621792">
-                <a:tc>
-                  <a:txBody>
-                    <a:bodyPr wrap="square"/>
-                    <a:lstStyle/>
-                    <a:p>
-                      <a:r>
-                        <a:rPr sz="950" b="0">
-                          <a:solidFill>
-                            <a:srgbClr val="1F2430"/>
-                          </a:solidFill>
-                          <a:latin typeface="Helvetica Neue"/>
-                        </a:rPr>
-                        <a:t>3</a:t>
-                      </a:r>
-                    </a:p>
-                  </a:txBody>
-                  <a:tcPr marL="54864" marR="54864" marT="18288" marB="18288" anchor="ctr">
-                    <a:solidFill>
-                      <a:srgbClr val="FAF7F2"/>
-                    </a:solidFill>
-                  </a:tcPr>
-                </a:tc>
-                <a:tc>
-                  <a:txBody>
-                    <a:bodyPr wrap="square"/>
-                    <a:lstStyle/>
-                    <a:p>
-                      <a:r>
-                        <a:rPr sz="950" b="0">
-                          <a:solidFill>
-                            <a:srgbClr val="1F2430"/>
-                          </a:solidFill>
-                          <a:latin typeface="Helvetica Neue"/>
-                        </a:rPr>
-                        <a:t>Real-user research: Functional UI walkthrough of the running product</a:t>
-                      </a:r>
-                    </a:p>
-                  </a:txBody>
-                  <a:tcPr marL="54864" marR="54864" marT="18288" marB="18288" anchor="ctr">
-                    <a:solidFill>
-                      <a:srgbClr val="FAF7F2"/>
-                    </a:solidFill>
-                  </a:tcPr>
-                </a:tc>
-              </a:tr>
-            </a:tbl>
-          </a:graphicData>
-        </a:graphic>
-      </p:graphicFrame>
     </p:spTree>
   </p:cSld>
   <p:clrMapOvr>

--- a/docs/gallery/demo-deck.pptx
+++ b/docs/gallery/demo-deck.pptx
@@ -7371,7 +7371,7 @@
                 </a:solidFill>
                 <a:latin typeface="Helvetica Neue"/>
               </a:rPr>
-              <a:t>•  feasibility: red verdict on e0fd5940e71e4d0d8fff1b727aa34dff: verdict red, effort L - A rider-voted pickup map fights the optimizer head-on; every vote becomes a c</a:t>
+              <a:t>•  feasibility: red verdict on 9833796ca27440a4a50a86f45c4fb983: verdict red, effort L - A rider-voted pickup map fights the optimizer head-on; every vote becomes a c</a:t>
             </a:r>
           </a:p>
         </p:txBody>

--- a/docs/gallery/demo-deck.pptx
+++ b/docs/gallery/demo-deck.pptx
@@ -3252,7 +3252,7 @@
                 </a:solidFill>
                 <a:latin typeface="Helvetica Neue"/>
               </a:rPr>
-              <a:t>Session 'gallery' · 28 evidence items · 9 options · register 4/2/4 (supported/contradicted/untested) · ~$10.23</a:t>
+              <a:t>Session 'gallery' · 28 evidence items · 9 options · register 4/2/4 (supported/contradicted/untested) · ~$10.36</a:t>
             </a:r>
           </a:p>
         </p:txBody>
@@ -4512,7 +4512,7 @@
                           </a:solidFill>
                           <a:latin typeface="Helvetica Neue"/>
                         </a:rPr>
-                        <a:t>$10.23 · 62 model calls</a:t>
+                        <a:t>$10.36 · 63 model calls</a:t>
                       </a:r>
                     </a:p>
                   </a:txBody>
@@ -5538,7 +5538,7 @@
                 </a:solidFill>
                 <a:latin typeface="Helvetica Neue"/>
               </a:rPr>
-              <a:t>•  claude-opus-5: 11 calls, $2.03</a:t>
+              <a:t>•  claude-opus-5: 12 calls, $2.16</a:t>
             </a:r>
           </a:p>
           <a:p>
@@ -7371,7 +7371,7 @@
                 </a:solidFill>
                 <a:latin typeface="Helvetica Neue"/>
               </a:rPr>
-              <a:t>•  feasibility: red verdict on 9833796ca27440a4a50a86f45c4fb983: verdict red, effort L - A rider-voted pickup map fights the optimizer head-on; every vote becomes a c</a:t>
+              <a:t>•  feasibility: red verdict on 4e51e915d49843be82430d6bb9293a77: verdict red, effort L - A rider-voted pickup map fights the optimizer head-on; every vote becomes a c</a:t>
             </a:r>
           </a:p>
         </p:txBody>
@@ -9044,7 +9044,7 @@
                 </a:solidFill>
                 <a:latin typeface="Helvetica Neue"/>
               </a:rPr>
-              <a:t>Kata interventions (7)</a:t>
+              <a:t>Kata interventions (8)</a:t>
             </a:r>
           </a:p>
           <a:p>
@@ -9124,7 +9124,7 @@
                 </a:solidFill>
                 <a:latin typeface="Helvetica Neue"/>
               </a:rPr>
-              <a:t>•  stage_contract (prototype)</a:t>
+              <a:t>•  timebox_pivot (ideate)</a:t>
             </a:r>
           </a:p>
         </p:txBody>

--- a/docs/gallery/demo-deck.pptx
+++ b/docs/gallery/demo-deck.pptx
@@ -7371,7 +7371,7 @@
                 </a:solidFill>
                 <a:latin typeface="Helvetica Neue"/>
               </a:rPr>
-              <a:t>•  feasibility: red verdict on 4e51e915d49843be82430d6bb9293a77: verdict red, effort L - A rider-voted pickup map fights the optimizer head-on; every vote becomes a c</a:t>
+              <a:t>•  feasibility: red verdict on a5967a0c059c4f038a09f6fbeccaba6c: verdict red, effort L - A rider-voted pickup map fights the optimizer head-on; every vote becomes a c</a:t>
             </a:r>
           </a:p>
         </p:txBody>
